--- a/Lectures/06-data-exploration.pptx
+++ b/Lectures/06-data-exploration.pptx
@@ -266,14 +266,14 @@
       <p15:sldGuideLst xmlns:p15="http://schemas.microsoft.com/office/powerpoint/2012/main"/>
     </p:ext>
     <p:ext uri="http://customooxmlschemas.google.com/">
-      <go:slidesCustomData xmlns="" xmlns:mc="http://schemas.openxmlformats.org/markup-compatibility/2006" xmlns:mv="urn:schemas-microsoft-com:mac:vml" xmlns:c="http://schemas.openxmlformats.org/drawingml/2006/chart" xmlns:dgm="http://schemas.openxmlformats.org/drawingml/2006/diagram" xmlns:o="urn:schemas-microsoft-com:office:office" xmlns:v="urn:schemas-microsoft-com:vml" xmlns:pvml="urn:schemas-microsoft-com:office:powerpoint" xmlns:com="http://schemas.openxmlformats.org/drawingml/2006/compatibility" xmlns:p14="http://schemas.microsoft.com/office/powerpoint/2010/main" xmlns:p15="http://schemas.microsoft.com/office/powerpoint/2012/main" xmlns:go="http://customooxmlschemas.google.com/" r:id="rId31" roundtripDataSignature="AMtx7mjFyVUGRZWio+dc9dxzYsimUxNJbg=="/>
+      <go:slidesCustomData xmlns:go="http://customooxmlschemas.google.com/" xmlns:p15="http://schemas.microsoft.com/office/powerpoint/2012/main" xmlns:p14="http://schemas.microsoft.com/office/powerpoint/2010/main" xmlns:com="http://schemas.openxmlformats.org/drawingml/2006/compatibility" xmlns:pvml="urn:schemas-microsoft-com:office:powerpoint" xmlns:v="urn:schemas-microsoft-com:vml" xmlns:o="urn:schemas-microsoft-com:office:office" xmlns:dgm="http://schemas.openxmlformats.org/drawingml/2006/diagram" xmlns:c="http://schemas.openxmlformats.org/drawingml/2006/chart" xmlns:mv="urn:schemas-microsoft-com:mac:vml" xmlns:mc="http://schemas.openxmlformats.org/markup-compatibility/2006" xmlns="" r:id="rId31" roundtripDataSignature="AMtx7mjFyVUGRZWio+dc9dxzYsimUxNJbg=="/>
     </p:ext>
   </p:extLst>
 </p:presentation>
 </file>
 
 <file path=ppt/diagrams/colors1.xml><?xml version="1.0" encoding="utf-8"?>
-<dgm:colorsDef xmlns:dgm="http://schemas.openxmlformats.org/drawingml/2006/diagram" xmlns:a="http://schemas.openxmlformats.org/drawingml/2006/main" uniqueId="urn:microsoft.com/office/officeart/2005/8/colors/colorful1">
+<dgm:colorsDef xmlns:dgm="http://schemas.openxmlformats.org/drawingml/2006/diagram" xmlns:a="http://schemas.openxmlformats.org/drawingml/2006/main" uniqueId="urn:microsoft.com/office/officeart/2005/8/colors/colorful1#1">
   <dgm:title val=""/>
   <dgm:desc val=""/>
   <dgm:catLst>
@@ -1195,7 +1195,7 @@
 <dgm:dataModel xmlns:dgm="http://schemas.openxmlformats.org/drawingml/2006/diagram" xmlns:a="http://schemas.openxmlformats.org/drawingml/2006/main">
   <dgm:ptLst>
     <dgm:pt modelId="{E9FB0F4E-6967-3B44-A32F-E8B1C7AE98D5}" type="doc">
-      <dgm:prSet loTypeId="urn:microsoft.com/office/officeart/2005/8/layout/process5" loCatId="" qsTypeId="urn:microsoft.com/office/officeart/2005/8/quickstyle/simple1" qsCatId="simple" csTypeId="urn:microsoft.com/office/officeart/2005/8/colors/colorful1" csCatId="colorful" phldr="1"/>
+      <dgm:prSet loTypeId="urn:microsoft.com/office/officeart/2005/8/layout/process5" loCatId="" qsTypeId="urn:microsoft.com/office/officeart/2005/8/quickstyle/simple1#1" qsCatId="simple" csTypeId="urn:microsoft.com/office/officeart/2005/8/colors/colorful1#1" csCatId="colorful" phldr="1"/>
       <dgm:spPr/>
       <dgm:t>
         <a:bodyPr/>
@@ -4244,7 +4244,7 @@
 </file>
 
 <file path=ppt/diagrams/quickStyle1.xml><?xml version="1.0" encoding="utf-8"?>
-<dgm:styleDef xmlns:dgm="http://schemas.openxmlformats.org/drawingml/2006/diagram" xmlns:a="http://schemas.openxmlformats.org/drawingml/2006/main" uniqueId="urn:microsoft.com/office/officeart/2005/8/quickstyle/simple1">
+<dgm:styleDef xmlns:dgm="http://schemas.openxmlformats.org/drawingml/2006/diagram" xmlns:a="http://schemas.openxmlformats.org/drawingml/2006/main" uniqueId="urn:microsoft.com/office/officeart/2005/8/quickstyle/simple1#1">
   <dgm:title val=""/>
   <dgm:desc val=""/>
   <dgm:catLst>
@@ -13292,7 +13292,16 @@
           <a:p>
             <a:r>
               <a:rPr lang="en-US" dirty="0"/>
-              <a:t>Wednesday session tomorrow: </a:t>
+              <a:t>Project work time on Thursday</a:t>
+            </a:r>
+          </a:p>
+          <a:p>
+            <a:endParaRPr lang="en-US" b="1" dirty="0"/>
+          </a:p>
+          <a:p>
+            <a:r>
+              <a:rPr lang="en-US" dirty="0"/>
+              <a:t>Friday session : </a:t>
             </a:r>
             <a:r>
               <a:rPr lang="en-US" dirty="0" err="1"/>
@@ -13308,31 +13317,6 @@
             <a:r>
               <a:rPr lang="en-US" dirty="0"/>
               <a:t>Short Pre-session assignment on canvas</a:t>
-            </a:r>
-          </a:p>
-          <a:p>
-            <a:pPr>
-              <a:lnSpc>
-                <a:spcPct val="100000"/>
-              </a:lnSpc>
-              <a:spcBef>
-                <a:spcPts val="500"/>
-              </a:spcBef>
-            </a:pPr>
-            <a:endParaRPr lang="en-US" dirty="0"/>
-          </a:p>
-          <a:p>
-            <a:pPr>
-              <a:lnSpc>
-                <a:spcPct val="100000"/>
-              </a:lnSpc>
-              <a:spcBef>
-                <a:spcPts val="500"/>
-              </a:spcBef>
-            </a:pPr>
-            <a:r>
-              <a:rPr lang="en-US" dirty="0"/>
-              <a:t>Readings for next week</a:t>
             </a:r>
           </a:p>
           <a:p>
@@ -13374,7 +13358,7 @@
                   <a:srgbClr val="C00000"/>
                 </a:solidFill>
               </a:rPr>
-              <a:t>next Friday</a:t>
+              <a:t>next week</a:t>
             </a:r>
             <a:r>
               <a:rPr lang="en-US" dirty="0"/>
@@ -13402,7 +13386,7 @@
     <p:bg>
       <p:bgPr>
         <a:solidFill>
-          <a:srgbClr val="FFFFFF"/>
+          <a:srgbClr val="1A1A1A"/>
         </a:solidFill>
         <a:effectLst/>
       </p:bgPr>
@@ -13426,7 +13410,7 @@
           <p:cNvPr id="2" name="Rectangle 1">
             <a:extLst>
               <a:ext uri="{FF2B5EF4-FFF2-40B4-BE49-F238E27FC236}">
-                <a16:creationId xmlns:a16="http://schemas.microsoft.com/office/drawing/2014/main" id="{1F46694F-F076-D36D-CDFA-0A40FA5CC401}"/>
+                <a16:creationId xmlns:a16="http://schemas.microsoft.com/office/drawing/2014/main" id="{755B4ED4-9588-EAFA-4B9A-97BB43552D9A}"/>
               </a:ext>
             </a:extLst>
           </p:cNvPr>
@@ -13446,10 +13430,10 @@
             <a:avLst/>
           </a:prstGeom>
           <a:blipFill>
-            <a:blip r:embed="rId5">
+            <a:blip>
               <a:extLst>
                 <a:ext uri="{96DAC541-7B7A-43D3-8B79-37D633B846F1}">
-                  <asvg:svgBlip xmlns:asvg="http://schemas.microsoft.com/office/drawing/2016/SVG/main" r:embed="rId6"/>
+                  <asvg:svgBlip xmlns:asvg="http://schemas.microsoft.com/office/drawing/2016/SVG/main" r:embed="rId7"/>
                 </a:ext>
               </a:extLst>
             </a:blip>
@@ -13457,11 +13441,21 @@
               <a:fillRect/>
             </a:stretch>
           </a:blipFill>
-          <a:ln>
-            <a:solidFill>
-              <a:srgbClr val="FFFFFF"/>
-            </a:solidFill>
+          <a:ln w="25400" cap="flat" cmpd="sng" algn="ctr">
+            <a:noFill/>
+            <a:prstDash val="solid"/>
           </a:ln>
+          <a:effectLst/>
+          <a:extLst>
+            <a:ext uri="{91240B29-F687-4F45-9708-019B960494DF}">
+              <a14:hiddenLine xmlns:a14="http://schemas.microsoft.com/office/drawing/2010/main" w="25400" cap="flat" cmpd="sng" algn="ctr">
+                <a:solidFill>
+                  <a:srgbClr val="FFFFFF"/>
+                </a:solidFill>
+                <a:prstDash val="solid"/>
+              </a14:hiddenLine>
+            </a:ext>
+          </a:extLst>
         </p:spPr>
         <p:style>
           <a:lnRef idx="2">
@@ -13493,7 +13487,7 @@
           <p:cNvPr id="3" name="Rectangle 2">
             <a:extLst>
               <a:ext uri="{FF2B5EF4-FFF2-40B4-BE49-F238E27FC236}">
-                <a16:creationId xmlns:a16="http://schemas.microsoft.com/office/drawing/2014/main" id="{ED8EF2B0-929F-7137-BB25-C07B098A42A3}"/>
+                <a16:creationId xmlns:a16="http://schemas.microsoft.com/office/drawing/2014/main" id="{D46649F3-EC12-4C0B-793A-C37A116B8848}"/>
               </a:ext>
             </a:extLst>
           </p:cNvPr>
@@ -13514,9 +13508,7 @@
           </a:prstGeom>
           <a:noFill/>
           <a:ln w="25400" cap="flat" cmpd="sng" algn="ctr">
-            <a:solidFill>
-              <a:srgbClr val="FFFFFF"/>
-            </a:solidFill>
+            <a:noFill/>
             <a:prstDash val="solid"/>
           </a:ln>
           <a:effectLst/>
@@ -13527,6 +13519,14 @@
                   <a:schemeClr val="accent1"/>
                 </a:solidFill>
               </a14:hiddenFill>
+            </a:ext>
+            <a:ext uri="{91240B29-F687-4F45-9708-019B960494DF}">
+              <a14:hiddenLine xmlns:a14="http://schemas.microsoft.com/office/drawing/2010/main" w="25400" cap="flat" cmpd="sng" algn="ctr">
+                <a:solidFill>
+                  <a:srgbClr val="FFFFFF"/>
+                </a:solidFill>
+                <a:prstDash val="solid"/>
+              </a14:hiddenLine>
             </a:ext>
           </a:extLst>
         </p:spPr>
@@ -13553,7 +13553,7 @@
             <a:r>
               <a:rPr lang="en-US" sz="4000" b="1">
                 <a:solidFill>
-                  <a:srgbClr val="000000"/>
+                  <a:srgbClr val="FFFFFF"/>
                 </a:solidFill>
               </a:rPr>
               <a:t>Have you already started exploring  your project data?
@@ -13567,12 +13567,16 @@
           <p:cNvPr id="4" name="Rectangle 3">
             <a:extLst>
               <a:ext uri="{FF2B5EF4-FFF2-40B4-BE49-F238E27FC236}">
-                <a16:creationId xmlns:a16="http://schemas.microsoft.com/office/drawing/2014/main" id="{2CAF230D-3751-D193-8268-EFE95CC03354}"/>
+                <a16:creationId xmlns:a16="http://schemas.microsoft.com/office/drawing/2014/main" id="{129AC89B-C698-1A22-4AB9-66670446AA83}"/>
               </a:ext>
             </a:extLst>
           </p:cNvPr>
           <p:cNvSpPr/>
-          <p:nvPr/>
+          <p:nvPr>
+            <p:custDataLst>
+              <p:tags r:id="rId4"/>
+            </p:custDataLst>
+          </p:nvPr>
         </p:nvSpPr>
         <p:spPr>
           <a:xfrm>
@@ -13638,7 +13642,7 @@
                 <a:solidFill>
                   <a:srgbClr val="FFFFFF"/>
                 </a:solidFill>
-                <a:hlinkClick r:id="rId7">
+                <a:hlinkClick r:id="rId8">
                   <a:extLst>
                     <a:ext uri="{A12FA001-AC4F-418D-AE19-62706E023703}">
                       <ahyp:hlinkClr xmlns:ahyp="http://schemas.microsoft.com/office/drawing/2018/hyperlinkcolor" val="tx"/>
@@ -13664,7 +13668,7 @@
           <p:cNvPr id="6" name="Graphic 5">
             <a:extLst>
               <a:ext uri="{FF2B5EF4-FFF2-40B4-BE49-F238E27FC236}">
-                <a16:creationId xmlns:a16="http://schemas.microsoft.com/office/drawing/2014/main" id="{FE5B34C2-05A8-ECB8-69C0-FB7F7B9DB954}"/>
+                <a16:creationId xmlns:a16="http://schemas.microsoft.com/office/drawing/2014/main" id="{5AF2C577-23C0-FEFA-9DD2-336DCF7064DB}"/>
               </a:ext>
             </a:extLst>
           </p:cNvPr>
@@ -13674,7 +13678,7 @@
           <p:nvPr/>
         </p:nvPicPr>
         <p:blipFill>
-          <a:blip r:embed="rId8">
+          <a:blip>
             <a:extLst>
               <a:ext uri="{96DAC541-7B7A-43D3-8B79-37D633B846F1}">
                 <asvg:svgBlip xmlns:asvg="http://schemas.microsoft.com/office/drawing/2016/SVG/main" r:embed="rId9"/>
@@ -13700,12 +13704,16 @@
           <p:cNvPr id="7" name="Trapezoid 6">
             <a:extLst>
               <a:ext uri="{FF2B5EF4-FFF2-40B4-BE49-F238E27FC236}">
-                <a16:creationId xmlns:a16="http://schemas.microsoft.com/office/drawing/2014/main" id="{859FDE97-A1FA-9DDA-BE0E-84EDB46A55C6}"/>
+                <a16:creationId xmlns:a16="http://schemas.microsoft.com/office/drawing/2014/main" id="{639E0905-8561-B619-6231-0C2B1A4CEE06}"/>
               </a:ext>
             </a:extLst>
           </p:cNvPr>
           <p:cNvSpPr/>
-          <p:nvPr/>
+          <p:nvPr>
+            <p:custDataLst>
+              <p:tags r:id="rId5"/>
+            </p:custDataLst>
+          </p:nvPr>
         </p:nvSpPr>
         <p:spPr>
           <a:xfrm rot="2700000">
@@ -13718,7 +13726,7 @@
             </a:avLst>
           </a:prstGeom>
           <a:solidFill>
-            <a:srgbClr val="EDFAF2"/>
+            <a:srgbClr val="0A3316"/>
           </a:solidFill>
           <a:ln w="25400" cap="flat" cmpd="sng" algn="ctr">
             <a:noFill/>
@@ -13764,7 +13772,7 @@
             <a:r>
               <a:rPr lang="en-US" sz="2600" b="1">
                 <a:solidFill>
-                  <a:srgbClr val="198038"/>
+                  <a:srgbClr val="42A65F"/>
                 </a:solidFill>
               </a:rPr>
               <a:t>Do not edit
@@ -13773,7 +13781,7 @@
             <a:r>
               <a:rPr lang="en-US" sz="2200">
                 <a:solidFill>
-                  <a:srgbClr val="198038"/>
+                  <a:srgbClr val="42A65F"/>
                 </a:solidFill>
                 <a:hlinkClick r:id="rId10">
                   <a:extLst>
@@ -13787,7 +13795,7 @@
             </a:r>
             <a:endParaRPr lang="en-US" sz="2200">
               <a:solidFill>
-                <a:srgbClr val="198038"/>
+                <a:srgbClr val="42A65F"/>
               </a:solidFill>
             </a:endParaRPr>
           </a:p>
@@ -13798,7 +13806,7 @@
           <p:cNvPr id="9" name="Graphic 8">
             <a:extLst>
               <a:ext uri="{FF2B5EF4-FFF2-40B4-BE49-F238E27FC236}">
-                <a16:creationId xmlns:a16="http://schemas.microsoft.com/office/drawing/2014/main" id="{8B0E3C63-3EDD-10BF-DAEE-935332753BDC}"/>
+                <a16:creationId xmlns:a16="http://schemas.microsoft.com/office/drawing/2014/main" id="{6ED1AC3A-AAE0-C6C9-5DEE-3E87B5CF7783}"/>
               </a:ext>
             </a:extLst>
           </p:cNvPr>
@@ -13808,10 +13816,10 @@
           <p:nvPr/>
         </p:nvPicPr>
         <p:blipFill>
-          <a:blip r:embed="rId11">
+          <a:blip>
             <a:extLst>
               <a:ext uri="{96DAC541-7B7A-43D3-8B79-37D633B846F1}">
-                <asvg:svgBlip xmlns:asvg="http://schemas.microsoft.com/office/drawing/2016/SVG/main" r:embed="rId12"/>
+                <asvg:svgBlip xmlns:asvg="http://schemas.microsoft.com/office/drawing/2016/SVG/main" r:embed="rId11"/>
               </a:ext>
             </a:extLst>
           </a:blip>
@@ -13835,90 +13843,13 @@
     </p:custDataLst>
     <p:extLst>
       <p:ext uri="{BB962C8B-B14F-4D97-AF65-F5344CB8AC3E}">
-        <p14:creationId xmlns:p14="http://schemas.microsoft.com/office/powerpoint/2010/main" val="340250850"/>
+        <p14:creationId xmlns:p14="http://schemas.microsoft.com/office/powerpoint/2010/main" val="3469071599"/>
       </p:ext>
     </p:extLst>
   </p:cSld>
   <p:clrMapOvr>
     <a:masterClrMapping/>
   </p:clrMapOvr>
-  <p:timing>
-    <p:tnLst>
-      <p:par>
-        <p:cTn id="1" dur="indefinite" restart="never" nodeType="tmRoot">
-          <p:childTnLst>
-            <p:seq concurrent="1" nextAc="seek">
-              <p:cTn id="2" dur="indefinite" nodeType="mainSeq">
-                <p:childTnLst>
-                  <p:par>
-                    <p:cTn id="3" fill="hold">
-                      <p:stCondLst>
-                        <p:cond delay="indefinite"/>
-                      </p:stCondLst>
-                      <p:childTnLst>
-                        <p:par>
-                          <p:cTn id="4" fill="hold">
-                            <p:stCondLst>
-                              <p:cond delay="0"/>
-                            </p:stCondLst>
-                            <p:childTnLst>
-                              <p:par>
-                                <p:cTn id="5" presetID="26" presetClass="emph" presetSubtype="0" fill="hold" grpId="0" nodeType="clickEffect">
-                                  <p:stCondLst>
-                                    <p:cond delay="0"/>
-                                  </p:stCondLst>
-                                  <p:childTnLst>
-                                    <p:animEffect transition="out" filter="fade">
-                                      <p:cBhvr>
-                                        <p:cTn id="6" dur="50" tmFilter="0, 0; .2, .5; .8, .5; 1, 0"/>
-                                        <p:tgtEl>
-                                          <p:spTgt spid="3"/>
-                                        </p:tgtEl>
-                                      </p:cBhvr>
-                                    </p:animEffect>
-                                    <p:animScale>
-                                      <p:cBhvr>
-                                        <p:cTn id="7" dur="25" autoRev="1" fill="hold"/>
-                                        <p:tgtEl>
-                                          <p:spTgt spid="3"/>
-                                        </p:tgtEl>
-                                      </p:cBhvr>
-                                      <p:by x="105000" y="105000"/>
-                                    </p:animScale>
-                                  </p:childTnLst>
-                                </p:cTn>
-                              </p:par>
-                            </p:childTnLst>
-                          </p:cTn>
-                        </p:par>
-                      </p:childTnLst>
-                    </p:cTn>
-                  </p:par>
-                </p:childTnLst>
-              </p:cTn>
-              <p:prevCondLst>
-                <p:cond evt="onPrev" delay="0">
-                  <p:tgtEl>
-                    <p:sldTgt/>
-                  </p:tgtEl>
-                </p:cond>
-              </p:prevCondLst>
-              <p:nextCondLst>
-                <p:cond evt="onNext" delay="0">
-                  <p:tgtEl>
-                    <p:sldTgt/>
-                  </p:tgtEl>
-                </p:cond>
-              </p:nextCondLst>
-            </p:seq>
-          </p:childTnLst>
-        </p:cTn>
-      </p:par>
-    </p:tnLst>
-    <p:bldLst>
-      <p:bldP spid="3" grpId="0" animBg="1"/>
-    </p:bldLst>
-  </p:timing>
 </p:sld>
 </file>
 
@@ -14451,16 +14382,16 @@
 <p:tagLst xmlns:a="http://schemas.openxmlformats.org/drawingml/2006/main" xmlns:r="http://schemas.openxmlformats.org/officeDocument/2006/relationships" xmlns:p="http://schemas.openxmlformats.org/presentationml/2006/main">
   <p:tag name="SLIDO_APP_VERSION" val="1.5.0.0"/>
   <p:tag name="SLIDO_PRESENTATION_ID" val="46df2339-773e-4de5-8227-a2648ad57b2f"/>
-  <p:tag name="SLIDO_EVENT_UUID" val="606d3060-a568-4588-a241-3a97192e31fe"/>
-  <p:tag name="SLIDO_EVENT_SECTION_UUID" val="07e0abdb-b0f8-4b83-94f8-1a04124a2d9c"/>
+  <p:tag name="SLIDO_EVENT_UUID" val="4ee70ca1-e1e6-4271-9fce-4efcf7d701cb"/>
+  <p:tag name="SLIDO_EVENT_SECTION_UUID" val="4e6b9f65-e842-4d53-9e0b-c4f65d721159"/>
 </p:tagLst>
 </file>
 
 <file path=ppt/tags/tag2.xml><?xml version="1.0" encoding="utf-8"?>
 <p:tagLst xmlns:a="http://schemas.openxmlformats.org/drawingml/2006/main" xmlns:r="http://schemas.openxmlformats.org/officeDocument/2006/relationships" xmlns:p="http://schemas.openxmlformats.org/presentationml/2006/main">
   <p:tag name="SLIDO_TYPE" val="SlidoPoll"/>
-  <p:tag name="SLIDO_POLL_UUID" val="8509f90d-b18b-412d-8129-edcb5aded232"/>
-  <p:tag name="SLIDO_TIMELINE" val="W3sic2hvd1Jlc3VsdHMiOmZhbHNlLCJwb2xsUXVlc3Rpb25VdWlkIjoiNmY2ZWY4MzItNmI4OS00YjBiLWEyZjctZmMzZjAwMTEwMjllIn0seyJzaG93UmVzdWx0cyI6dHJ1ZSwicG9sbFF1ZXN0aW9uVXVpZCI6IjZmNmVmODMyLTZiODktNGIwYi1hMmY3LWZjM2YwMDExMDI5ZSJ9XQ=="/>
+  <p:tag name="SLIDO_POLL_UUID" val="0df1303e-91cb-4a2f-bc17-f939c0e53d3e"/>
+  <p:tag name="SLIDO_TIMELINE" val="W3sicG9sbFF1ZXN0aW9uVXVpZCI6ImFlYTM0N2VhLWExZDItNDI2Yy04NWMwLTc1ODAzYzBjNzQyYiIsInNob3dSZXN1bHRzIjp0cnVlfV0="/>
 </p:tagLst>
 </file>
 
@@ -14474,6 +14405,18 @@
 <file path=ppt/tags/tag4.xml><?xml version="1.0" encoding="utf-8"?>
 <p:tagLst xmlns:a="http://schemas.openxmlformats.org/drawingml/2006/main" xmlns:r="http://schemas.openxmlformats.org/officeDocument/2006/relationships" xmlns:p="http://schemas.openxmlformats.org/presentationml/2006/main">
   <p:tag name="SLIDO_ELEMENT" val="title"/>
+</p:tagLst>
+</file>
+
+<file path=ppt/tags/tag5.xml><?xml version="1.0" encoding="utf-8"?>
+<p:tagLst xmlns:a="http://schemas.openxmlformats.org/drawingml/2006/main" xmlns:r="http://schemas.openxmlformats.org/officeDocument/2006/relationships" xmlns:p="http://schemas.openxmlformats.org/presentationml/2006/main">
+  <p:tag name="SLIDO_ELEMENT" val="footer"/>
+</p:tagLst>
+</file>
+
+<file path=ppt/tags/tag6.xml><?xml version="1.0" encoding="utf-8"?>
+<p:tagLst xmlns:a="http://schemas.openxmlformats.org/drawingml/2006/main" xmlns:r="http://schemas.openxmlformats.org/officeDocument/2006/relationships" xmlns:p="http://schemas.openxmlformats.org/presentationml/2006/main">
+  <p:tag name="SLIDO_ELEMENT" val="corner"/>
 </p:tagLst>
 </file>
 

--- a/Lectures/06-data-exploration.pptx
+++ b/Lectures/06-data-exploration.pptx
@@ -5,7 +5,7 @@
     <p:sldMasterId id="2147483648" r:id="rId1"/>
   </p:sldMasterIdLst>
   <p:notesMasterIdLst>
-    <p:notesMasterId r:id="rId20"/>
+    <p:notesMasterId r:id="rId21"/>
   </p:notesMasterIdLst>
   <p:sldIdLst>
     <p:sldId id="256" r:id="rId2"/>
@@ -23,14 +23,15 @@
     <p:sldId id="298" r:id="rId14"/>
     <p:sldId id="260" r:id="rId15"/>
     <p:sldId id="311" r:id="rId16"/>
-    <p:sldId id="318" r:id="rId17"/>
-    <p:sldId id="315" r:id="rId18"/>
-    <p:sldId id="519" r:id="rId19"/>
+    <p:sldId id="315" r:id="rId17"/>
+    <p:sldId id="521" r:id="rId18"/>
+    <p:sldId id="318" r:id="rId19"/>
+    <p:sldId id="519" r:id="rId20"/>
   </p:sldIdLst>
   <p:sldSz cx="12192000" cy="6858000"/>
   <p:notesSz cx="6858000" cy="9144000"/>
   <p:custDataLst>
-    <p:tags r:id="rId21"/>
+    <p:tags r:id="rId22"/>
   </p:custDataLst>
   <p:defaultTextStyle>
     <a:defPPr marR="0" lvl="0" algn="l" rtl="0">
@@ -12660,7 +12661,7 @@
             </a:pPr>
             <a:r>
               <a:rPr lang="en-US" sz="4800" dirty="0"/>
-              <a:t>Team Coordination &amp; Data Exploration</a:t>
+              <a:t>Data Exploration</a:t>
             </a:r>
           </a:p>
         </p:txBody>
@@ -12679,130 +12680,6 @@
 </file>
 
 <file path=ppt/slides/slide16.xml><?xml version="1.0" encoding="utf-8"?>
-<p:sld xmlns:a="http://schemas.openxmlformats.org/drawingml/2006/main" xmlns:r="http://schemas.openxmlformats.org/officeDocument/2006/relationships" xmlns:p="http://schemas.openxmlformats.org/presentationml/2006/main">
-  <p:cSld>
-    <p:spTree>
-      <p:nvGrpSpPr>
-        <p:cNvPr id="1" name=""/>
-        <p:cNvGrpSpPr/>
-        <p:nvPr/>
-      </p:nvGrpSpPr>
-      <p:grpSpPr>
-        <a:xfrm>
-          <a:off x="0" y="0"/>
-          <a:ext cx="0" cy="0"/>
-          <a:chOff x="0" y="0"/>
-          <a:chExt cx="0" cy="0"/>
-        </a:xfrm>
-      </p:grpSpPr>
-      <p:sp>
-        <p:nvSpPr>
-          <p:cNvPr id="2" name="Title 1">
-            <a:extLst>
-              <a:ext uri="{FF2B5EF4-FFF2-40B4-BE49-F238E27FC236}">
-                <a16:creationId xmlns:a16="http://schemas.microsoft.com/office/drawing/2014/main" id="{C433C44B-9CD1-E54C-BEDE-3018CFE1A62F}"/>
-              </a:ext>
-            </a:extLst>
-          </p:cNvPr>
-          <p:cNvSpPr>
-            <a:spLocks noGrp="1"/>
-          </p:cNvSpPr>
-          <p:nvPr>
-            <p:ph type="title"/>
-          </p:nvPr>
-        </p:nvSpPr>
-        <p:spPr/>
-        <p:txBody>
-          <a:bodyPr/>
-          <a:lstStyle/>
-          <a:p>
-            <a:r>
-              <a:rPr lang="en-US" dirty="0"/>
-              <a:t>What do we want you to use this time for?</a:t>
-            </a:r>
-          </a:p>
-        </p:txBody>
-      </p:sp>
-      <p:sp>
-        <p:nvSpPr>
-          <p:cNvPr id="3" name="Text Placeholder 2">
-            <a:extLst>
-              <a:ext uri="{FF2B5EF4-FFF2-40B4-BE49-F238E27FC236}">
-                <a16:creationId xmlns:a16="http://schemas.microsoft.com/office/drawing/2014/main" id="{306939D4-1B3B-C04C-AFE6-D7C738B5CC7F}"/>
-              </a:ext>
-            </a:extLst>
-          </p:cNvPr>
-          <p:cNvSpPr>
-            <a:spLocks noGrp="1"/>
-          </p:cNvSpPr>
-          <p:nvPr>
-            <p:ph type="body" idx="1"/>
-          </p:nvPr>
-        </p:nvSpPr>
-        <p:spPr/>
-        <p:txBody>
-          <a:bodyPr/>
-          <a:lstStyle/>
-          <a:p>
-            <a:pPr>
-              <a:lnSpc>
-                <a:spcPct val="150000"/>
-              </a:lnSpc>
-            </a:pPr>
-            <a:r>
-              <a:rPr lang="en-US" sz="2800" dirty="0"/>
-              <a:t>Get to know each other</a:t>
-            </a:r>
-          </a:p>
-          <a:p>
-            <a:pPr>
-              <a:lnSpc>
-                <a:spcPct val="150000"/>
-              </a:lnSpc>
-            </a:pPr>
-            <a:r>
-              <a:rPr lang="en-US" sz="2800" dirty="0"/>
-              <a:t>Discuss how you’re going to work together</a:t>
-            </a:r>
-          </a:p>
-          <a:p>
-            <a:pPr>
-              <a:lnSpc>
-                <a:spcPct val="150000"/>
-              </a:lnSpc>
-            </a:pPr>
-            <a:r>
-              <a:rPr lang="en-US" sz="2800" dirty="0"/>
-              <a:t>Schedule times to work on the project proposal over the next week </a:t>
-            </a:r>
-          </a:p>
-          <a:p>
-            <a:pPr>
-              <a:lnSpc>
-                <a:spcPct val="150000"/>
-              </a:lnSpc>
-            </a:pPr>
-            <a:r>
-              <a:rPr lang="en-US" sz="2800" dirty="0"/>
-              <a:t>Spend some time starting to explore your project data</a:t>
-            </a:r>
-          </a:p>
-        </p:txBody>
-      </p:sp>
-    </p:spTree>
-    <p:extLst>
-      <p:ext uri="{BB962C8B-B14F-4D97-AF65-F5344CB8AC3E}">
-        <p14:creationId xmlns:p14="http://schemas.microsoft.com/office/powerpoint/2010/main" val="4248997981"/>
-      </p:ext>
-    </p:extLst>
-  </p:cSld>
-  <p:clrMapOvr>
-    <a:masterClrMapping/>
-  </p:clrMapOvr>
-</p:sld>
-</file>
-
-<file path=ppt/slides/slide17.xml><?xml version="1.0" encoding="utf-8"?>
 <p:sld xmlns:a="http://schemas.openxmlformats.org/drawingml/2006/main" xmlns:r="http://schemas.openxmlformats.org/officeDocument/2006/relationships" xmlns:p="http://schemas.openxmlformats.org/presentationml/2006/main">
   <p:cSld>
     <p:spTree>
@@ -12948,7 +12825,223 @@
 </p:sld>
 </file>
 
+<file path=ppt/slides/slide17.xml><?xml version="1.0" encoding="utf-8"?>
+<p:sld xmlns:a="http://schemas.openxmlformats.org/drawingml/2006/main" xmlns:r="http://schemas.openxmlformats.org/officeDocument/2006/relationships" xmlns:p="http://schemas.openxmlformats.org/presentationml/2006/main">
+  <p:cSld>
+    <p:spTree>
+      <p:nvGrpSpPr>
+        <p:cNvPr id="1" name="">
+          <a:extLst>
+            <a:ext uri="{FF2B5EF4-FFF2-40B4-BE49-F238E27FC236}">
+              <a16:creationId xmlns:a16="http://schemas.microsoft.com/office/drawing/2014/main" id="{6CCE7A70-0294-B5C1-4500-DAEFCC36A38B}"/>
+            </a:ext>
+          </a:extLst>
+        </p:cNvPr>
+        <p:cNvGrpSpPr/>
+        <p:nvPr/>
+      </p:nvGrpSpPr>
+      <p:grpSpPr>
+        <a:xfrm>
+          <a:off x="0" y="0"/>
+          <a:ext cx="0" cy="0"/>
+          <a:chOff x="0" y="0"/>
+          <a:chExt cx="0" cy="0"/>
+        </a:xfrm>
+      </p:grpSpPr>
+      <p:sp>
+        <p:nvSpPr>
+          <p:cNvPr id="4" name="Text Placeholder 3">
+            <a:extLst>
+              <a:ext uri="{FF2B5EF4-FFF2-40B4-BE49-F238E27FC236}">
+                <a16:creationId xmlns:a16="http://schemas.microsoft.com/office/drawing/2014/main" id="{7BEC862B-32E9-0EA4-EA7E-65799ABD7D36}"/>
+              </a:ext>
+            </a:extLst>
+          </p:cNvPr>
+          <p:cNvSpPr>
+            <a:spLocks noGrp="1"/>
+          </p:cNvSpPr>
+          <p:nvPr>
+            <p:ph type="body" idx="1"/>
+          </p:nvPr>
+        </p:nvSpPr>
+        <p:spPr>
+          <a:xfrm>
+            <a:off x="415650" y="2724664"/>
+            <a:ext cx="11360700" cy="1408672"/>
+          </a:xfrm>
+        </p:spPr>
+        <p:txBody>
+          <a:bodyPr/>
+          <a:lstStyle/>
+          <a:p>
+            <a:pPr marL="76200" indent="0" algn="ctr">
+              <a:buNone/>
+            </a:pPr>
+            <a:r>
+              <a:rPr lang="en-US" sz="4800" dirty="0"/>
+              <a:t>Project Work:</a:t>
+            </a:r>
+          </a:p>
+          <a:p>
+            <a:pPr marL="76200" indent="0" algn="ctr">
+              <a:buNone/>
+            </a:pPr>
+            <a:r>
+              <a:rPr lang="en-US" sz="4800" dirty="0"/>
+              <a:t>Team Working Style and Norms</a:t>
+            </a:r>
+          </a:p>
+        </p:txBody>
+      </p:sp>
+    </p:spTree>
+    <p:extLst>
+      <p:ext uri="{BB962C8B-B14F-4D97-AF65-F5344CB8AC3E}">
+        <p14:creationId xmlns:p14="http://schemas.microsoft.com/office/powerpoint/2010/main" val="1475621782"/>
+      </p:ext>
+    </p:extLst>
+  </p:cSld>
+  <p:clrMapOvr>
+    <a:masterClrMapping/>
+  </p:clrMapOvr>
+</p:sld>
+</file>
+
 <file path=ppt/slides/slide18.xml><?xml version="1.0" encoding="utf-8"?>
+<p:sld xmlns:a="http://schemas.openxmlformats.org/drawingml/2006/main" xmlns:r="http://schemas.openxmlformats.org/officeDocument/2006/relationships" xmlns:p="http://schemas.openxmlformats.org/presentationml/2006/main">
+  <p:cSld>
+    <p:spTree>
+      <p:nvGrpSpPr>
+        <p:cNvPr id="1" name=""/>
+        <p:cNvGrpSpPr/>
+        <p:nvPr/>
+      </p:nvGrpSpPr>
+      <p:grpSpPr>
+        <a:xfrm>
+          <a:off x="0" y="0"/>
+          <a:ext cx="0" cy="0"/>
+          <a:chOff x="0" y="0"/>
+          <a:chExt cx="0" cy="0"/>
+        </a:xfrm>
+      </p:grpSpPr>
+      <p:sp>
+        <p:nvSpPr>
+          <p:cNvPr id="2" name="Title 1">
+            <a:extLst>
+              <a:ext uri="{FF2B5EF4-FFF2-40B4-BE49-F238E27FC236}">
+                <a16:creationId xmlns:a16="http://schemas.microsoft.com/office/drawing/2014/main" id="{C433C44B-9CD1-E54C-BEDE-3018CFE1A62F}"/>
+              </a:ext>
+            </a:extLst>
+          </p:cNvPr>
+          <p:cNvSpPr>
+            <a:spLocks noGrp="1"/>
+          </p:cNvSpPr>
+          <p:nvPr>
+            <p:ph type="title"/>
+          </p:nvPr>
+        </p:nvSpPr>
+        <p:spPr/>
+        <p:txBody>
+          <a:bodyPr/>
+          <a:lstStyle/>
+          <a:p>
+            <a:r>
+              <a:rPr lang="en-US" dirty="0"/>
+              <a:t>What do we want you to use this time for?</a:t>
+            </a:r>
+          </a:p>
+        </p:txBody>
+      </p:sp>
+      <p:sp>
+        <p:nvSpPr>
+          <p:cNvPr id="3" name="Text Placeholder 2">
+            <a:extLst>
+              <a:ext uri="{FF2B5EF4-FFF2-40B4-BE49-F238E27FC236}">
+                <a16:creationId xmlns:a16="http://schemas.microsoft.com/office/drawing/2014/main" id="{306939D4-1B3B-C04C-AFE6-D7C738B5CC7F}"/>
+              </a:ext>
+            </a:extLst>
+          </p:cNvPr>
+          <p:cNvSpPr>
+            <a:spLocks noGrp="1"/>
+          </p:cNvSpPr>
+          <p:nvPr>
+            <p:ph type="body" idx="1"/>
+          </p:nvPr>
+        </p:nvSpPr>
+        <p:spPr/>
+        <p:txBody>
+          <a:bodyPr/>
+          <a:lstStyle/>
+          <a:p>
+            <a:pPr>
+              <a:lnSpc>
+                <a:spcPct val="150000"/>
+              </a:lnSpc>
+            </a:pPr>
+            <a:r>
+              <a:rPr lang="en-US" sz="2800" dirty="0"/>
+              <a:t>Get to know each other</a:t>
+            </a:r>
+          </a:p>
+          <a:p>
+            <a:pPr>
+              <a:lnSpc>
+                <a:spcPct val="150000"/>
+              </a:lnSpc>
+            </a:pPr>
+            <a:r>
+              <a:rPr lang="en-US" sz="2800" dirty="0"/>
+              <a:t>Discuss how you’re going to work together</a:t>
+            </a:r>
+          </a:p>
+          <a:p>
+            <a:pPr>
+              <a:lnSpc>
+                <a:spcPct val="150000"/>
+              </a:lnSpc>
+            </a:pPr>
+            <a:r>
+              <a:rPr lang="en-US" sz="2800" dirty="0"/>
+              <a:t>Strengths, What you want to improve on, Work style, schedule</a:t>
+            </a:r>
+          </a:p>
+          <a:p>
+            <a:pPr>
+              <a:lnSpc>
+                <a:spcPct val="150000"/>
+              </a:lnSpc>
+            </a:pPr>
+            <a:r>
+              <a:rPr lang="en-US" sz="2800" dirty="0"/>
+              <a:t>Schedule times to work on the project proposal over the next week </a:t>
+            </a:r>
+          </a:p>
+          <a:p>
+            <a:pPr>
+              <a:lnSpc>
+                <a:spcPct val="150000"/>
+              </a:lnSpc>
+            </a:pPr>
+            <a:r>
+              <a:rPr lang="en-US" sz="2800" dirty="0"/>
+              <a:t>Continue to explore your project data</a:t>
+            </a:r>
+          </a:p>
+        </p:txBody>
+      </p:sp>
+    </p:spTree>
+    <p:extLst>
+      <p:ext uri="{BB962C8B-B14F-4D97-AF65-F5344CB8AC3E}">
+        <p14:creationId xmlns:p14="http://schemas.microsoft.com/office/powerpoint/2010/main" val="4248997981"/>
+      </p:ext>
+    </p:extLst>
+  </p:cSld>
+  <p:clrMapOvr>
+    <a:masterClrMapping/>
+  </p:clrMapOvr>
+</p:sld>
+</file>
+
+<file path=ppt/slides/slide19.xml><?xml version="1.0" encoding="utf-8"?>
 <p:sld xmlns:a="http://schemas.openxmlformats.org/drawingml/2006/main" xmlns:r="http://schemas.openxmlformats.org/officeDocument/2006/relationships" xmlns:p="http://schemas.openxmlformats.org/presentationml/2006/main">
   <p:cSld>
     <p:spTree>
@@ -13034,7 +13127,7 @@
           <a:p>
             <a:r>
               <a:rPr lang="en-US" dirty="0"/>
-              <a:t>Wednesday session tomorrow: </a:t>
+              <a:t>Friday session : </a:t>
             </a:r>
             <a:r>
               <a:rPr lang="en-US" dirty="0" err="1">
@@ -13050,7 +13143,7 @@
                   <a:srgbClr val="FFFF00"/>
                 </a:highlight>
               </a:rPr>
-              <a:t>  (short assignment before the session)</a:t>
+              <a:t>  (short assignment before the session on canvas)</a:t>
             </a:r>
           </a:p>
           <a:p>

--- a/Lectures/06-data-exploration.pptx
+++ b/Lectures/06-data-exploration.pptx
@@ -5,33 +5,32 @@
     <p:sldMasterId id="2147483648" r:id="rId1"/>
   </p:sldMasterIdLst>
   <p:notesMasterIdLst>
-    <p:notesMasterId r:id="rId21"/>
+    <p:notesMasterId r:id="rId20"/>
   </p:notesMasterIdLst>
   <p:sldIdLst>
     <p:sldId id="256" r:id="rId2"/>
     <p:sldId id="308" r:id="rId3"/>
-    <p:sldId id="302" r:id="rId4"/>
-    <p:sldId id="520" r:id="rId5"/>
-    <p:sldId id="312" r:id="rId6"/>
-    <p:sldId id="295" r:id="rId7"/>
-    <p:sldId id="282" r:id="rId8"/>
-    <p:sldId id="518" r:id="rId9"/>
-    <p:sldId id="261" r:id="rId10"/>
-    <p:sldId id="300" r:id="rId11"/>
-    <p:sldId id="285" r:id="rId12"/>
-    <p:sldId id="283" r:id="rId13"/>
-    <p:sldId id="298" r:id="rId14"/>
-    <p:sldId id="260" r:id="rId15"/>
-    <p:sldId id="311" r:id="rId16"/>
-    <p:sldId id="315" r:id="rId17"/>
-    <p:sldId id="521" r:id="rId18"/>
-    <p:sldId id="318" r:id="rId19"/>
-    <p:sldId id="519" r:id="rId20"/>
+    <p:sldId id="520" r:id="rId4"/>
+    <p:sldId id="312" r:id="rId5"/>
+    <p:sldId id="295" r:id="rId6"/>
+    <p:sldId id="282" r:id="rId7"/>
+    <p:sldId id="518" r:id="rId8"/>
+    <p:sldId id="261" r:id="rId9"/>
+    <p:sldId id="300" r:id="rId10"/>
+    <p:sldId id="285" r:id="rId11"/>
+    <p:sldId id="283" r:id="rId12"/>
+    <p:sldId id="298" r:id="rId13"/>
+    <p:sldId id="260" r:id="rId14"/>
+    <p:sldId id="311" r:id="rId15"/>
+    <p:sldId id="315" r:id="rId16"/>
+    <p:sldId id="521" r:id="rId17"/>
+    <p:sldId id="318" r:id="rId18"/>
+    <p:sldId id="519" r:id="rId19"/>
   </p:sldIdLst>
   <p:sldSz cx="12192000" cy="6858000"/>
   <p:notesSz cx="6858000" cy="9144000"/>
   <p:custDataLst>
-    <p:tags r:id="rId22"/>
+    <p:tags r:id="rId21"/>
   </p:custDataLst>
   <p:defaultTextStyle>
     <a:defPPr marR="0" lvl="0" algn="l" rtl="0">
@@ -12103,152 +12102,6 @@
       </p:grpSpPr>
       <p:sp>
         <p:nvSpPr>
-          <p:cNvPr id="8194" name="Rectangle 2"/>
-          <p:cNvSpPr>
-            <a:spLocks noGrp="1" noChangeArrowheads="1"/>
-          </p:cNvSpPr>
-          <p:nvPr>
-            <p:ph type="title"/>
-          </p:nvPr>
-        </p:nvSpPr>
-        <p:spPr/>
-        <p:txBody>
-          <a:bodyPr/>
-          <a:lstStyle/>
-          <a:p>
-            <a:r>
-              <a:rPr lang="en-US" altLang="en-US" dirty="0"/>
-              <a:t> Some tips for exploring your project data</a:t>
-            </a:r>
-          </a:p>
-        </p:txBody>
-      </p:sp>
-      <p:sp>
-        <p:nvSpPr>
-          <p:cNvPr id="8195" name="Rectangle 3"/>
-          <p:cNvSpPr>
-            <a:spLocks noGrp="1" noChangeArrowheads="1"/>
-          </p:cNvSpPr>
-          <p:nvPr>
-            <p:ph type="body" idx="1"/>
-          </p:nvPr>
-        </p:nvSpPr>
-        <p:spPr>
-          <a:xfrm>
-            <a:off x="121458" y="1536633"/>
-            <a:ext cx="11948984" cy="4876524"/>
-          </a:xfrm>
-        </p:spPr>
-        <p:txBody>
-          <a:bodyPr/>
-          <a:lstStyle/>
-          <a:p>
-            <a:pPr>
-              <a:lnSpc>
-                <a:spcPct val="120000"/>
-              </a:lnSpc>
-            </a:pPr>
-            <a:r>
-              <a:rPr lang="en-US" b="1" dirty="0"/>
-              <a:t>Tables</a:t>
-            </a:r>
-            <a:r>
-              <a:rPr lang="en-US" dirty="0"/>
-              <a:t>: identify the database tables that are most relevant to your problem</a:t>
-            </a:r>
-          </a:p>
-          <a:p>
-            <a:pPr>
-              <a:lnSpc>
-                <a:spcPct val="120000"/>
-              </a:lnSpc>
-            </a:pPr>
-            <a:r>
-              <a:rPr lang="en-US" b="1" dirty="0"/>
-              <a:t>Entities</a:t>
-            </a:r>
-            <a:r>
-              <a:rPr lang="en-US" dirty="0"/>
-              <a:t>: How can you identify the primary entities from your project? What are some basic/relevant characteristics about them? How have those changed over time?</a:t>
-            </a:r>
-          </a:p>
-          <a:p>
-            <a:pPr>
-              <a:lnSpc>
-                <a:spcPct val="120000"/>
-              </a:lnSpc>
-            </a:pPr>
-            <a:r>
-              <a:rPr lang="en-US" b="1" dirty="0"/>
-              <a:t>Fields</a:t>
-            </a:r>
-            <a:r>
-              <a:rPr lang="en-US" dirty="0"/>
-              <a:t>: Most projects have a lot of different data fields, but don’t feel like your initial exploration needs to understand everything</a:t>
-            </a:r>
-          </a:p>
-          <a:p>
-            <a:pPr>
-              <a:lnSpc>
-                <a:spcPct val="120000"/>
-              </a:lnSpc>
-            </a:pPr>
-            <a:r>
-              <a:rPr lang="en-US" b="1" dirty="0"/>
-              <a:t>Label</a:t>
-            </a:r>
-            <a:r>
-              <a:rPr lang="en-US" dirty="0"/>
-              <a:t>: Think about how you might define your label? What can you say about its distribution and how it’s changed over time?</a:t>
-            </a:r>
-          </a:p>
-          <a:p>
-            <a:pPr>
-              <a:lnSpc>
-                <a:spcPct val="120000"/>
-              </a:lnSpc>
-            </a:pPr>
-            <a:r>
-              <a:rPr lang="en-US" dirty="0">
-                <a:effectLst/>
-              </a:rPr>
-              <a:t>Based on what you know of the context, what information would you expect to be important in modeling? Is this available? How well does it correlate with your label?</a:t>
-            </a:r>
-          </a:p>
-        </p:txBody>
-      </p:sp>
-    </p:spTree>
-    <p:extLst>
-      <p:ext uri="{BB962C8B-B14F-4D97-AF65-F5344CB8AC3E}">
-        <p14:creationId xmlns:p14="http://schemas.microsoft.com/office/powerpoint/2010/main" val="367351454"/>
-      </p:ext>
-    </p:extLst>
-  </p:cSld>
-  <p:clrMapOvr>
-    <a:masterClrMapping/>
-  </p:clrMapOvr>
-</p:sld>
-</file>
-
-<file path=ppt/slides/slide11.xml><?xml version="1.0" encoding="utf-8"?>
-<p:sld xmlns:a="http://schemas.openxmlformats.org/drawingml/2006/main" xmlns:r="http://schemas.openxmlformats.org/officeDocument/2006/relationships" xmlns:p="http://schemas.openxmlformats.org/presentationml/2006/main">
-  <p:cSld>
-    <p:spTree>
-      <p:nvGrpSpPr>
-        <p:cNvPr id="1" name=""/>
-        <p:cNvGrpSpPr/>
-        <p:nvPr/>
-      </p:nvGrpSpPr>
-      <p:grpSpPr>
-        <a:xfrm>
-          <a:off x="0" y="0"/>
-          <a:ext cx="0" cy="0"/>
-          <a:chOff x="0" y="0"/>
-          <a:chExt cx="0" cy="0"/>
-        </a:xfrm>
-      </p:grpSpPr>
-      <p:sp>
-        <p:nvSpPr>
           <p:cNvPr id="2" name="Title 1">
             <a:extLst>
               <a:ext uri="{FF2B5EF4-FFF2-40B4-BE49-F238E27FC236}">
@@ -12352,7 +12205,7 @@
 </p:sld>
 </file>
 
-<file path=ppt/slides/slide12.xml><?xml version="1.0" encoding="utf-8"?>
+<file path=ppt/slides/slide11.xml><?xml version="1.0" encoding="utf-8"?>
 <p:sld xmlns:a="http://schemas.openxmlformats.org/drawingml/2006/main" xmlns:r="http://schemas.openxmlformats.org/officeDocument/2006/relationships" xmlns:p="http://schemas.openxmlformats.org/presentationml/2006/main">
   <p:cSld>
     <p:spTree>
@@ -12412,7 +12265,7 @@
 </p:sld>
 </file>
 
-<file path=ppt/slides/slide13.xml><?xml version="1.0" encoding="utf-8"?>
+<file path=ppt/slides/slide12.xml><?xml version="1.0" encoding="utf-8"?>
 <p:sld xmlns:a="http://schemas.openxmlformats.org/drawingml/2006/main" xmlns:r="http://schemas.openxmlformats.org/officeDocument/2006/relationships" xmlns:p="http://schemas.openxmlformats.org/presentationml/2006/main">
   <p:cSld>
     <p:spTree>
@@ -12489,7 +12342,7 @@
 </p:sld>
 </file>
 
-<file path=ppt/slides/slide14.xml><?xml version="1.0" encoding="utf-8"?>
+<file path=ppt/slides/slide13.xml><?xml version="1.0" encoding="utf-8"?>
 <p:sld xmlns:a="http://schemas.openxmlformats.org/drawingml/2006/main" xmlns:r="http://schemas.openxmlformats.org/officeDocument/2006/relationships" xmlns:p="http://schemas.openxmlformats.org/presentationml/2006/main">
   <p:cSld>
     <p:spTree>
@@ -12604,7 +12457,7 @@
 </p:sld>
 </file>
 
-<file path=ppt/slides/slide15.xml><?xml version="1.0" encoding="utf-8"?>
+<file path=ppt/slides/slide14.xml><?xml version="1.0" encoding="utf-8"?>
 <p:sld xmlns:a="http://schemas.openxmlformats.org/drawingml/2006/main" xmlns:r="http://schemas.openxmlformats.org/officeDocument/2006/relationships" xmlns:p="http://schemas.openxmlformats.org/presentationml/2006/main">
   <p:cSld>
     <p:spTree>
@@ -12666,6 +12519,42 @@
           </a:p>
         </p:txBody>
       </p:sp>
+      <p:pic>
+        <p:nvPicPr>
+          <p:cNvPr id="3" name="Graphic 2" descr="QR preview">
+            <a:extLst>
+              <a:ext uri="{FF2B5EF4-FFF2-40B4-BE49-F238E27FC236}">
+                <a16:creationId xmlns:a16="http://schemas.microsoft.com/office/drawing/2014/main" id="{6EB95337-2F92-50E9-41D8-C93A5D53AA06}"/>
+              </a:ext>
+            </a:extLst>
+          </p:cNvPr>
+          <p:cNvPicPr>
+            <a:picLocks noChangeAspect="1"/>
+          </p:cNvPicPr>
+          <p:nvPr/>
+        </p:nvPicPr>
+        <p:blipFill>
+          <a:blip>
+            <a:extLst>
+              <a:ext uri="{96DAC541-7B7A-43D3-8B79-37D633B846F1}">
+                <asvg:svgBlip xmlns:asvg="http://schemas.microsoft.com/office/drawing/2016/SVG/main" r:embed="rId2"/>
+              </a:ext>
+            </a:extLst>
+          </a:blip>
+          <a:stretch>
+            <a:fillRect/>
+          </a:stretch>
+        </p:blipFill>
+        <p:spPr>
+          <a:xfrm>
+            <a:off x="8673632" y="3414408"/>
+            <a:ext cx="3102718" cy="3102718"/>
+          </a:xfrm>
+          <a:prstGeom prst="rect">
+            <a:avLst/>
+          </a:prstGeom>
+        </p:spPr>
+      </p:pic>
     </p:spTree>
     <p:extLst>
       <p:ext uri="{BB962C8B-B14F-4D97-AF65-F5344CB8AC3E}">
@@ -12679,7 +12568,7 @@
 </p:sld>
 </file>
 
-<file path=ppt/slides/slide16.xml><?xml version="1.0" encoding="utf-8"?>
+<file path=ppt/slides/slide15.xml><?xml version="1.0" encoding="utf-8"?>
 <p:sld xmlns:a="http://schemas.openxmlformats.org/drawingml/2006/main" xmlns:r="http://schemas.openxmlformats.org/officeDocument/2006/relationships" xmlns:p="http://schemas.openxmlformats.org/presentationml/2006/main">
   <p:cSld>
     <p:spTree>
@@ -12825,7 +12714,7 @@
 </p:sld>
 </file>
 
-<file path=ppt/slides/slide17.xml><?xml version="1.0" encoding="utf-8"?>
+<file path=ppt/slides/slide16.xml><?xml version="1.0" encoding="utf-8"?>
 <p:sld xmlns:a="http://schemas.openxmlformats.org/drawingml/2006/main" xmlns:r="http://schemas.openxmlformats.org/officeDocument/2006/relationships" xmlns:p="http://schemas.openxmlformats.org/presentationml/2006/main">
   <p:cSld>
     <p:spTree>
@@ -12906,7 +12795,7 @@
 </p:sld>
 </file>
 
-<file path=ppt/slides/slide18.xml><?xml version="1.0" encoding="utf-8"?>
+<file path=ppt/slides/slide17.xml><?xml version="1.0" encoding="utf-8"?>
 <p:sld xmlns:a="http://schemas.openxmlformats.org/drawingml/2006/main" xmlns:r="http://schemas.openxmlformats.org/officeDocument/2006/relationships" xmlns:p="http://schemas.openxmlformats.org/presentationml/2006/main">
   <p:cSld>
     <p:spTree>
@@ -13041,7 +12930,7 @@
 </p:sld>
 </file>
 
-<file path=ppt/slides/slide19.xml><?xml version="1.0" encoding="utf-8"?>
+<file path=ppt/slides/slide18.xml><?xml version="1.0" encoding="utf-8"?>
 <p:sld xmlns:a="http://schemas.openxmlformats.org/drawingml/2006/main" xmlns:r="http://schemas.openxmlformats.org/officeDocument/2006/relationships" xmlns:p="http://schemas.openxmlformats.org/presentationml/2006/main">
   <p:cSld>
     <p:spTree>
@@ -13300,180 +13189,6 @@
 </file>
 
 <file path=ppt/slides/slide3.xml><?xml version="1.0" encoding="utf-8"?>
-<p:sld xmlns:a="http://schemas.openxmlformats.org/drawingml/2006/main" xmlns:r="http://schemas.openxmlformats.org/officeDocument/2006/relationships" xmlns:p="http://schemas.openxmlformats.org/presentationml/2006/main">
-  <p:cSld>
-    <p:spTree>
-      <p:nvGrpSpPr>
-        <p:cNvPr id="1" name=""/>
-        <p:cNvGrpSpPr/>
-        <p:nvPr/>
-      </p:nvGrpSpPr>
-      <p:grpSpPr>
-        <a:xfrm>
-          <a:off x="0" y="0"/>
-          <a:ext cx="0" cy="0"/>
-          <a:chOff x="0" y="0"/>
-          <a:chExt cx="0" cy="0"/>
-        </a:xfrm>
-      </p:grpSpPr>
-      <p:sp>
-        <p:nvSpPr>
-          <p:cNvPr id="3" name="Title 2">
-            <a:extLst>
-              <a:ext uri="{FF2B5EF4-FFF2-40B4-BE49-F238E27FC236}">
-                <a16:creationId xmlns:a16="http://schemas.microsoft.com/office/drawing/2014/main" id="{9323871C-7CA8-1448-8FFC-1AE6E1838941}"/>
-              </a:ext>
-            </a:extLst>
-          </p:cNvPr>
-          <p:cNvSpPr>
-            <a:spLocks noGrp="1"/>
-          </p:cNvSpPr>
-          <p:nvPr>
-            <p:ph type="title"/>
-          </p:nvPr>
-        </p:nvSpPr>
-        <p:spPr/>
-        <p:txBody>
-          <a:bodyPr/>
-          <a:lstStyle/>
-          <a:p>
-            <a:r>
-              <a:rPr lang="en-US" dirty="0"/>
-              <a:t>Things to remember</a:t>
-            </a:r>
-          </a:p>
-        </p:txBody>
-      </p:sp>
-      <p:sp>
-        <p:nvSpPr>
-          <p:cNvPr id="4" name="Text Placeholder 3">
-            <a:extLst>
-              <a:ext uri="{FF2B5EF4-FFF2-40B4-BE49-F238E27FC236}">
-                <a16:creationId xmlns:a16="http://schemas.microsoft.com/office/drawing/2014/main" id="{5E600BA7-FA45-884F-9820-9E5F2CB7AA48}"/>
-              </a:ext>
-            </a:extLst>
-          </p:cNvPr>
-          <p:cNvSpPr>
-            <a:spLocks noGrp="1"/>
-          </p:cNvSpPr>
-          <p:nvPr>
-            <p:ph type="body" idx="1"/>
-          </p:nvPr>
-        </p:nvSpPr>
-        <p:spPr/>
-        <p:txBody>
-          <a:bodyPr/>
-          <a:lstStyle/>
-          <a:p>
-            <a:r>
-              <a:rPr lang="en-US" b="1" dirty="0"/>
-              <a:t>Let us know if you can’t access your project data or </a:t>
-            </a:r>
-            <a:r>
-              <a:rPr lang="en-US" b="1" dirty="0" err="1"/>
-              <a:t>github</a:t>
-            </a:r>
-            <a:r>
-              <a:rPr lang="en-US" b="1" dirty="0"/>
-              <a:t> repo</a:t>
-            </a:r>
-            <a:br>
-              <a:rPr lang="en-US" b="1" dirty="0"/>
-            </a:br>
-            <a:endParaRPr lang="en-US" b="1" dirty="0"/>
-          </a:p>
-          <a:p>
-            <a:r>
-              <a:rPr lang="en-US" dirty="0"/>
-              <a:t>Project work time on Thursday</a:t>
-            </a:r>
-          </a:p>
-          <a:p>
-            <a:endParaRPr lang="en-US" b="1" dirty="0"/>
-          </a:p>
-          <a:p>
-            <a:r>
-              <a:rPr lang="en-US" dirty="0"/>
-              <a:t>Friday session : </a:t>
-            </a:r>
-            <a:r>
-              <a:rPr lang="en-US" dirty="0" err="1"/>
-              <a:t>Github</a:t>
-            </a:r>
-            <a:r>
-              <a:rPr lang="en-US" dirty="0"/>
-              <a:t> </a:t>
-            </a:r>
-          </a:p>
-          <a:p>
-            <a:pPr lvl="1"/>
-            <a:r>
-              <a:rPr lang="en-US" dirty="0"/>
-              <a:t>Short Pre-session assignment on canvas</a:t>
-            </a:r>
-          </a:p>
-          <a:p>
-            <a:pPr marL="76200" indent="0">
-              <a:lnSpc>
-                <a:spcPct val="100000"/>
-              </a:lnSpc>
-              <a:spcBef>
-                <a:spcPts val="500"/>
-              </a:spcBef>
-              <a:buNone/>
-            </a:pPr>
-            <a:endParaRPr lang="en-US" dirty="0"/>
-          </a:p>
-          <a:p>
-            <a:r>
-              <a:rPr lang="en-US" dirty="0"/>
-              <a:t>Make sure to read </a:t>
-            </a:r>
-            <a:r>
-              <a:rPr lang="en-US" b="1" dirty="0">
-                <a:solidFill>
-                  <a:srgbClr val="C00000"/>
-                </a:solidFill>
-              </a:rPr>
-              <a:t>project proposal</a:t>
-            </a:r>
-            <a:r>
-              <a:rPr lang="en-US" b="1" dirty="0"/>
-              <a:t> </a:t>
-            </a:r>
-            <a:r>
-              <a:rPr lang="en-US" dirty="0"/>
-              <a:t>assignment on canvas (due </a:t>
-            </a:r>
-            <a:r>
-              <a:rPr lang="en-US" b="1" dirty="0">
-                <a:solidFill>
-                  <a:srgbClr val="C00000"/>
-                </a:solidFill>
-              </a:rPr>
-              <a:t>next week</a:t>
-            </a:r>
-            <a:r>
-              <a:rPr lang="en-US" dirty="0"/>
-              <a:t>)</a:t>
-            </a:r>
-          </a:p>
-        </p:txBody>
-      </p:sp>
-    </p:spTree>
-    <p:extLst>
-      <p:ext uri="{BB962C8B-B14F-4D97-AF65-F5344CB8AC3E}">
-        <p14:creationId xmlns:p14="http://schemas.microsoft.com/office/powerpoint/2010/main" val="1926041242"/>
-      </p:ext>
-    </p:extLst>
-  </p:cSld>
-  <p:clrMapOvr>
-    <a:masterClrMapping/>
-  </p:clrMapOvr>
-</p:sld>
-</file>
-
-<file path=ppt/slides/slide4.xml><?xml version="1.0" encoding="utf-8"?>
 <p:sld xmlns:a="http://schemas.openxmlformats.org/drawingml/2006/main" xmlns:r="http://schemas.openxmlformats.org/officeDocument/2006/relationships" xmlns:p="http://schemas.openxmlformats.org/presentationml/2006/main" showMasterSp="0">
   <p:cSld>
     <p:bg>
@@ -13946,7 +13661,7 @@
 </p:sld>
 </file>
 
-<file path=ppt/slides/slide5.xml><?xml version="1.0" encoding="utf-8"?>
+<file path=ppt/slides/slide4.xml><?xml version="1.0" encoding="utf-8"?>
 <p:sld xmlns:a="http://schemas.openxmlformats.org/drawingml/2006/main" xmlns:r="http://schemas.openxmlformats.org/officeDocument/2006/relationships" xmlns:p="http://schemas.openxmlformats.org/presentationml/2006/main">
   <p:cSld>
     <p:spTree>
@@ -14012,7 +13727,7 @@
 </p:sld>
 </file>
 
-<file path=ppt/slides/slide6.xml><?xml version="1.0" encoding="utf-8"?>
+<file path=ppt/slides/slide5.xml><?xml version="1.0" encoding="utf-8"?>
 <p:sld xmlns:a="http://schemas.openxmlformats.org/drawingml/2006/main" xmlns:r="http://schemas.openxmlformats.org/officeDocument/2006/relationships" xmlns:p="http://schemas.openxmlformats.org/presentationml/2006/main">
   <p:cSld>
     <p:spTree>
@@ -14147,7 +13862,7 @@
 </p:sld>
 </file>
 
-<file path=ppt/slides/slide7.xml><?xml version="1.0" encoding="utf-8"?>
+<file path=ppt/slides/slide6.xml><?xml version="1.0" encoding="utf-8"?>
 <p:sld xmlns:a="http://schemas.openxmlformats.org/drawingml/2006/main" xmlns:r="http://schemas.openxmlformats.org/officeDocument/2006/relationships" xmlns:p="http://schemas.openxmlformats.org/presentationml/2006/main">
   <p:cSld>
     <p:spTree>
@@ -14205,7 +13920,7 @@
 </p:sld>
 </file>
 
-<file path=ppt/slides/slide8.xml><?xml version="1.0" encoding="utf-8"?>
+<file path=ppt/slides/slide7.xml><?xml version="1.0" encoding="utf-8"?>
 <p:sld xmlns:a="http://schemas.openxmlformats.org/drawingml/2006/main" xmlns:r="http://schemas.openxmlformats.org/officeDocument/2006/relationships" xmlns:p="http://schemas.openxmlformats.org/presentationml/2006/main">
   <p:cSld>
     <p:spTree>
@@ -14376,7 +14091,7 @@
 </p:sld>
 </file>
 
-<file path=ppt/slides/slide9.xml><?xml version="1.0" encoding="utf-8"?>
+<file path=ppt/slides/slide8.xml><?xml version="1.0" encoding="utf-8"?>
 <p:sld xmlns:a="http://schemas.openxmlformats.org/drawingml/2006/main" xmlns:r="http://schemas.openxmlformats.org/officeDocument/2006/relationships" xmlns:p="http://schemas.openxmlformats.org/presentationml/2006/main">
   <p:cSld>
     <p:spTree>
@@ -14462,6 +14177,152 @@
     <p:extLst>
       <p:ext uri="{BB962C8B-B14F-4D97-AF65-F5344CB8AC3E}">
         <p14:creationId xmlns:p14="http://schemas.microsoft.com/office/powerpoint/2010/main" val="2446059493"/>
+      </p:ext>
+    </p:extLst>
+  </p:cSld>
+  <p:clrMapOvr>
+    <a:masterClrMapping/>
+  </p:clrMapOvr>
+</p:sld>
+</file>
+
+<file path=ppt/slides/slide9.xml><?xml version="1.0" encoding="utf-8"?>
+<p:sld xmlns:a="http://schemas.openxmlformats.org/drawingml/2006/main" xmlns:r="http://schemas.openxmlformats.org/officeDocument/2006/relationships" xmlns:p="http://schemas.openxmlformats.org/presentationml/2006/main">
+  <p:cSld>
+    <p:spTree>
+      <p:nvGrpSpPr>
+        <p:cNvPr id="1" name=""/>
+        <p:cNvGrpSpPr/>
+        <p:nvPr/>
+      </p:nvGrpSpPr>
+      <p:grpSpPr>
+        <a:xfrm>
+          <a:off x="0" y="0"/>
+          <a:ext cx="0" cy="0"/>
+          <a:chOff x="0" y="0"/>
+          <a:chExt cx="0" cy="0"/>
+        </a:xfrm>
+      </p:grpSpPr>
+      <p:sp>
+        <p:nvSpPr>
+          <p:cNvPr id="8194" name="Rectangle 2"/>
+          <p:cNvSpPr>
+            <a:spLocks noGrp="1" noChangeArrowheads="1"/>
+          </p:cNvSpPr>
+          <p:nvPr>
+            <p:ph type="title"/>
+          </p:nvPr>
+        </p:nvSpPr>
+        <p:spPr/>
+        <p:txBody>
+          <a:bodyPr/>
+          <a:lstStyle/>
+          <a:p>
+            <a:r>
+              <a:rPr lang="en-US" altLang="en-US" dirty="0"/>
+              <a:t> Some tips for exploring your project data</a:t>
+            </a:r>
+          </a:p>
+        </p:txBody>
+      </p:sp>
+      <p:sp>
+        <p:nvSpPr>
+          <p:cNvPr id="8195" name="Rectangle 3"/>
+          <p:cNvSpPr>
+            <a:spLocks noGrp="1" noChangeArrowheads="1"/>
+          </p:cNvSpPr>
+          <p:nvPr>
+            <p:ph type="body" idx="1"/>
+          </p:nvPr>
+        </p:nvSpPr>
+        <p:spPr>
+          <a:xfrm>
+            <a:off x="121458" y="1536633"/>
+            <a:ext cx="11948984" cy="4876524"/>
+          </a:xfrm>
+        </p:spPr>
+        <p:txBody>
+          <a:bodyPr/>
+          <a:lstStyle/>
+          <a:p>
+            <a:pPr>
+              <a:lnSpc>
+                <a:spcPct val="120000"/>
+              </a:lnSpc>
+            </a:pPr>
+            <a:r>
+              <a:rPr lang="en-US" b="1" dirty="0"/>
+              <a:t>Tables</a:t>
+            </a:r>
+            <a:r>
+              <a:rPr lang="en-US" dirty="0"/>
+              <a:t>: identify the database tables that are most relevant to your problem</a:t>
+            </a:r>
+          </a:p>
+          <a:p>
+            <a:pPr>
+              <a:lnSpc>
+                <a:spcPct val="120000"/>
+              </a:lnSpc>
+            </a:pPr>
+            <a:r>
+              <a:rPr lang="en-US" b="1" dirty="0"/>
+              <a:t>Entities</a:t>
+            </a:r>
+            <a:r>
+              <a:rPr lang="en-US" dirty="0"/>
+              <a:t>: How can you identify the primary entities from your project? What are some basic/relevant characteristics about them? How have those changed over time?</a:t>
+            </a:r>
+          </a:p>
+          <a:p>
+            <a:pPr>
+              <a:lnSpc>
+                <a:spcPct val="120000"/>
+              </a:lnSpc>
+            </a:pPr>
+            <a:r>
+              <a:rPr lang="en-US" b="1" dirty="0"/>
+              <a:t>Fields</a:t>
+            </a:r>
+            <a:r>
+              <a:rPr lang="en-US" dirty="0"/>
+              <a:t>: Most projects have a lot of different data fields, but don’t feel like your initial exploration needs to understand everything</a:t>
+            </a:r>
+          </a:p>
+          <a:p>
+            <a:pPr>
+              <a:lnSpc>
+                <a:spcPct val="120000"/>
+              </a:lnSpc>
+            </a:pPr>
+            <a:r>
+              <a:rPr lang="en-US" b="1" dirty="0"/>
+              <a:t>Label</a:t>
+            </a:r>
+            <a:r>
+              <a:rPr lang="en-US" dirty="0"/>
+              <a:t>: Think about how you might define your label? What can you say about its distribution and how it’s changed over time?</a:t>
+            </a:r>
+          </a:p>
+          <a:p>
+            <a:pPr>
+              <a:lnSpc>
+                <a:spcPct val="120000"/>
+              </a:lnSpc>
+            </a:pPr>
+            <a:r>
+              <a:rPr lang="en-US" dirty="0">
+                <a:effectLst/>
+              </a:rPr>
+              <a:t>Based on what you know of the context, what information would you expect to be important in modeling? Is this available? How well does it correlate with your label?</a:t>
+            </a:r>
+          </a:p>
+        </p:txBody>
+      </p:sp>
+    </p:spTree>
+    <p:extLst>
+      <p:ext uri="{BB962C8B-B14F-4D97-AF65-F5344CB8AC3E}">
+        <p14:creationId xmlns:p14="http://schemas.microsoft.com/office/powerpoint/2010/main" val="367351454"/>
       </p:ext>
     </p:extLst>
   </p:cSld>
